--- a/presentations/research-trinzic-multicloud/Research_Trinzic_MultiCloud.pptx
+++ b/presentations/research-trinzic-multicloud/Research_Trinzic_MultiCloud.pptx
@@ -122,7 +122,7 @@
   <p:extLst>
     <p:ext uri="{521415D9-36F7-43E2-AB2F-B90AF26B5E84}">
       <p14:sectionLst xmlns:p14="http://schemas.microsoft.com/office/powerpoint/2010/main">
-        <p14:section name="Explainer" id="{3b31fafc-981e-76d5-0444-dd68762df5ee}">
+        <p14:section name="Explainer" id="{5a1046d4-caf2-ce8e-a3df-c96f1283bd32}">
           <p14:sldIdLst>
             <p14:sldId id="256"/>
             <p14:sldId id="257"/>
@@ -136,7 +136,7 @@
             <p14:sldId id="265"/>
           </p14:sldIdLst>
         </p14:section>
-        <p14:section name="Backup" id="{888f7c3c-bfed-3918-8651-ac14b5be90d5}">
+        <p14:section name="Backup" id="{e120733a-3a41-30c6-d1d9-a78816c47f41}">
           <p14:sldIdLst>
             <p14:sldId id="266"/>
             <p14:sldId id="267"/>
@@ -641,7 +641,7 @@
           <a:p>
             <a:r>
               <a:rPr lang="en-US" dirty="0"/>
-              <a:t>[14:12–15:20]  Where does this fit? Book 08 makes the vendor-neutral case. Chapter 02 explains split-brain, Chapter 07 covers cloud private endpoints and IPAM, Chapter 08 describes the policy plane that overlays cloud DNS, and Chapter 12 covers platform selection. The research deep dive, Infoblox DDI for Federal Agencies, covers the platform, its FedRAMP scope, its risks, and how divisions share it.
+              <a:t>[14:31–15:38]  Where does this fit? Book 08 makes the vendor-neutral case. Chapter 02 explains split-brain, Chapter 07 covers cloud private endpoints and IPAM, Chapter 08 describes the policy plane that overlays cloud DNS, and Chapter 12 covers platform selection. The research deep dive, Infoblox DDI for Federal Agencies, covers the platform, its FedRAMP scope, its risks, and how divisions share it.
 The decisions to take: which option for each cloud and impact level; one named owner for every zone; where DNSSEC keys live; and how address blocks reach each cloud.
 The next steps. Ask Infoblox for the Government Cloud authorization boundary and a feature matrix for GovCloud and Azure Government accounts. Confirm that DNS Private Resolver and Virtual Network Manager IPAM are available in Azure Government. Size NIOS-X capacity if you want cloud forwarders. And test forwarding in both directions from every origin.
 One note on standing: this is research under review, not an endorsement by any federal agency. Thank you.
@@ -1910,11 +1910,11 @@
           <a:p>
             <a:r>
               <a:rPr lang="en-US" dirty="0"/>
-              <a:t>[12:39–14:12]  The decision table. Every row is design guidance, not an endorsement, resting on the facts we've covered.
+              <a:t>[12:39–14:31]  The decision table. Every row is design guidance, not an endorsement, resting on the facts we've covered.
 Mostly on premises, with a small cloud footprint: Trinzic with native cloud resolvers and conditional forwarding, the minimal form of Option C. It's the lowest cost, needs no new SaaS authorization, and NIOS can't own cloud zones anyway.
 Hybrid with one cloud, commercial or government: add an HA vNIOS pair in a hub network, Option A plus C. It keeps resolution local if the WAN fails and extends response policy, signed zones and Grid IPAM into the cloud. vNIOS is documented for both GovCloud and Azure Government.
-Multi-cloud at FedRAMP Moderate and below: add Universal DDI on top, through Government Cloud for federal work. It's the only Infoblox mechanism that writes to cloud DNS, within the Government Cloud limits.
-GovCloud, Azure Government, FedRAMP High, or Defense Impact Levels 4 and 5: stay with options A and C only. Infoblox's SaaS is Moderate-only, the VPC IPAM integration excludes GovCloud, and native services carry the higher authorizations. Google lists Cloud DNS for High, IL4 and IL5 under Assured Workloads. For Azure Government, confirm DNS Private Resolver is available first.
+Multi-cloud at FedRAMP Moderate and below: add Universal DDI on top, through Government Cloud for federal work. That holds whether the Moderate workloads run in commercial regions or in GovCloud and Azure Government, which are valid Moderate locations too; Infoblox Government Cloud itself is hosted in GovCloud. It's the only Infoblox mechanism that writes to cloud DNS, within the Government Cloud limits, and the VPC IPAM integration excludes GovCloud. Confirm with Infoblox which hybrid features work against GovCloud and Azure Government accounts.
+FedRAMP High, or Defense Impact Levels 4 and 5, in any region: stay with options A and C only. Infoblox's SaaS is Moderate-only, and native services carry the higher authorizations. Google lists Cloud DNS for High, IL4 and IL5 under Assured Workloads. For Azure Government, confirm DNS Private Resolver is available first.
 In short, the design guidance is: Trinzic plus native cloud resolvers as the baseline, with vNIOS and Universal DDI added only where they earn their place.
 Sources: Research decision guidance table and its cited sources: Infoblox vDiscovery, vNIOS for AWS and Azure, Route 53 sync, Universal DDI integrations and FedRAMP release notes, Universal Asset Insights discovery pages; AWS Resolver, VPC IPAM + Infoblox, GovCloud Route 53; Google Assured Workloads supported products; FedRAMP Marketplace products.json.</a:t>
             </a:r>
@@ -18631,7 +18631,7 @@
                   </a:tcPr>
                 </a:tc>
               </a:tr>
-              <a:tr h="635508">
+              <a:tr h="810768">
                 <a:tc>
                   <a:txBody>
                     <a:bodyPr/>
@@ -18649,7 +18649,7 @@
                           <a:ea typeface="Calibri" pitchFamily="34" charset="-122"/>
                           <a:cs typeface="Calibri" pitchFamily="34" charset="-120"/>
                         </a:rPr>
-                        <a:t>Multi-cloud, FedRAMP Moderate and below</a:t>
+                        <a:t>Multi-cloud at FedRAMP Moderate (commercial, GovCloud or Azure Government)</a:t>
                       </a:r>
                       <a:endParaRPr lang="en-US" sz="1150" dirty="0">
                         <a:latin typeface="Calibri" charset="0"/>
@@ -18853,7 +18853,7 @@
                           <a:ea typeface="Calibri" pitchFamily="34" charset="-122"/>
                           <a:cs typeface="Calibri" pitchFamily="34" charset="-120"/>
                         </a:rPr>
-                        <a:t>Government Cloud: single AWS accounts, no Azure tenants, no VPC IPAM handoff</a:t>
+                        <a:t>Government Cloud: single AWS accounts, no Azure tenants, no VPC IPAM handoff; GovCloud and Azure Gov accounts: confirm</a:t>
                       </a:r>
                       <a:endParaRPr lang="en-US" sz="1150" dirty="0">
                         <a:latin typeface="Calibri" charset="0"/>
@@ -18905,7 +18905,7 @@
                   </a:tcPr>
                 </a:tc>
               </a:tr>
-              <a:tr h="810768">
+              <a:tr h="635508">
                 <a:tc>
                   <a:txBody>
                     <a:bodyPr/>
@@ -18923,7 +18923,7 @@
                           <a:ea typeface="Calibri" pitchFamily="34" charset="-122"/>
                           <a:cs typeface="Calibri" pitchFamily="34" charset="-120"/>
                         </a:rPr>
-                        <a:t>GovCloud, Azure Government, High, IL4–IL5</a:t>
+                        <a:t>FedRAMP High or IL4–IL5 systems</a:t>
                       </a:r>
                       <a:endParaRPr lang="en-US" sz="1150" dirty="0">
                         <a:latin typeface="Calibri" charset="0"/>
@@ -19127,7 +19127,7 @@
                           <a:ea typeface="Calibri" pitchFamily="34" charset="-122"/>
                           <a:cs typeface="Calibri" pitchFamily="34" charset="-120"/>
                         </a:rPr>
-                        <a:t>VPC IPAM integration excludes GovCloud; Cloud DNS on Assured Workloads High/IL4/IL5; Azure Gov resolver: confirm</a:t>
+                        <a:t>Cloud DNS on Assured Workloads High/IL4/IL5; Azure Gov resolver: confirm</a:t>
                       </a:r>
                       <a:endParaRPr lang="en-US" sz="1150" dirty="0">
                         <a:latin typeface="Calibri" charset="0"/>
